--- a/templates/ppt_template.pptx
+++ b/templates/ppt_template.pptx
@@ -5,10 +5,10 @@
     <p:sldMasterId id="2147483648" r:id="rId1"/>
   </p:sldMasterIdLst>
   <p:sldIdLst>
-    <p:sldId id="256" r:id="rId3"/>
-    <p:sldId id="257" r:id="rId4"/>
-    <p:sldId id="259" r:id="rId5"/>
-    <p:sldId id="258" r:id="rId6"/>
+    <p:sldId id="256" r:id="rId2"/>
+    <p:sldId id="257" r:id="rId3"/>
+    <p:sldId id="259" r:id="rId4"/>
+    <p:sldId id="16776925" r:id="rId5"/>
   </p:sldIdLst>
   <p:sldSz cx="12192000" cy="6858000"/>
   <p:notesSz cx="6858000" cy="9144000"/>
@@ -107,6 +107,11 @@
       </a:defRPr>
     </a:lvl9pPr>
   </p:defaultTextStyle>
+  <p:extLst>
+    <p:ext uri="{EFAFB233-063F-42B5-8137-9DF3F51BA10A}">
+      <p15:sldGuideLst xmlns:p15="http://schemas.microsoft.com/office/powerpoint/2012/main"/>
+    </p:ext>
+  </p:extLst>
 </p:presentation>
 </file>
 
@@ -155,7 +160,6 @@
               <a:rPr lang="zh-CN" altLang="en-US"/>
               <a:t>单击此处编辑母版标题样式</a:t>
             </a:r>
-            <a:endParaRPr lang="zh-CN" altLang="en-US"/>
           </a:p>
         </p:txBody>
       </p:sp>
@@ -220,7 +224,6 @@
               <a:rPr lang="zh-CN" altLang="en-US"/>
               <a:t>单击此处编辑母版副标题样式</a:t>
             </a:r>
-            <a:endParaRPr lang="zh-CN" altLang="en-US"/>
           </a:p>
         </p:txBody>
       </p:sp>
@@ -241,6 +244,7 @@
           <a:p>
             <a:fld id="{8E30BAFC-7326-4899-9BEC-7E31906EAAB6}" type="datetimeFigureOut">
               <a:rPr lang="zh-CN" altLang="en-US" smtClean="0"/>
+              <a:t>2026/8/21</a:t>
             </a:fld>
             <a:endParaRPr lang="zh-CN" altLang="en-US"/>
           </a:p>
@@ -282,6 +286,7 @@
           <a:p>
             <a:fld id="{BA48170D-50DB-4052-9D2B-D15E249EAEF9}" type="slidenum">
               <a:rPr lang="zh-CN" altLang="en-US" smtClean="0"/>
+              <a:t>‹#›</a:t>
             </a:fld>
             <a:endParaRPr lang="zh-CN" altLang="en-US"/>
           </a:p>
@@ -331,7 +336,6 @@
               <a:rPr lang="zh-CN" altLang="en-US"/>
               <a:t>单击此处编辑母版标题样式</a:t>
             </a:r>
-            <a:endParaRPr lang="zh-CN" altLang="en-US"/>
           </a:p>
         </p:txBody>
       </p:sp>
@@ -355,7 +359,6 @@
               <a:rPr lang="zh-CN" altLang="en-US"/>
               <a:t>单击此处编辑母版文本样式</a:t>
             </a:r>
-            <a:endParaRPr lang="zh-CN" altLang="en-US"/>
           </a:p>
           <a:p>
             <a:pPr lvl="1"/>
@@ -363,7 +366,6 @@
               <a:rPr lang="zh-CN" altLang="en-US"/>
               <a:t>二级</a:t>
             </a:r>
-            <a:endParaRPr lang="zh-CN" altLang="en-US"/>
           </a:p>
           <a:p>
             <a:pPr lvl="2"/>
@@ -371,7 +373,6 @@
               <a:rPr lang="zh-CN" altLang="en-US"/>
               <a:t>三级</a:t>
             </a:r>
-            <a:endParaRPr lang="zh-CN" altLang="en-US"/>
           </a:p>
           <a:p>
             <a:pPr lvl="3"/>
@@ -379,7 +380,6 @@
               <a:rPr lang="zh-CN" altLang="en-US"/>
               <a:t>四级</a:t>
             </a:r>
-            <a:endParaRPr lang="zh-CN" altLang="en-US"/>
           </a:p>
           <a:p>
             <a:pPr lvl="4"/>
@@ -387,7 +387,6 @@
               <a:rPr lang="zh-CN" altLang="en-US"/>
               <a:t>五级</a:t>
             </a:r>
-            <a:endParaRPr lang="zh-CN" altLang="en-US"/>
           </a:p>
         </p:txBody>
       </p:sp>
@@ -408,6 +407,7 @@
           <a:p>
             <a:fld id="{8E30BAFC-7326-4899-9BEC-7E31906EAAB6}" type="datetimeFigureOut">
               <a:rPr lang="zh-CN" altLang="en-US" smtClean="0"/>
+              <a:t>2026/8/21</a:t>
             </a:fld>
             <a:endParaRPr lang="zh-CN" altLang="en-US"/>
           </a:p>
@@ -449,6 +449,7 @@
           <a:p>
             <a:fld id="{BA48170D-50DB-4052-9D2B-D15E249EAEF9}" type="slidenum">
               <a:rPr lang="zh-CN" altLang="en-US" smtClean="0"/>
+              <a:t>‹#›</a:t>
             </a:fld>
             <a:endParaRPr lang="zh-CN" altLang="en-US"/>
           </a:p>
@@ -503,7 +504,6 @@
               <a:rPr lang="zh-CN" altLang="en-US"/>
               <a:t>单击此处编辑母版标题样式</a:t>
             </a:r>
-            <a:endParaRPr lang="zh-CN" altLang="en-US"/>
           </a:p>
         </p:txBody>
       </p:sp>
@@ -532,7 +532,6 @@
               <a:rPr lang="zh-CN" altLang="en-US"/>
               <a:t>单击此处编辑母版文本样式</a:t>
             </a:r>
-            <a:endParaRPr lang="zh-CN" altLang="en-US"/>
           </a:p>
           <a:p>
             <a:pPr lvl="1"/>
@@ -540,7 +539,6 @@
               <a:rPr lang="zh-CN" altLang="en-US"/>
               <a:t>二级</a:t>
             </a:r>
-            <a:endParaRPr lang="zh-CN" altLang="en-US"/>
           </a:p>
           <a:p>
             <a:pPr lvl="2"/>
@@ -548,7 +546,6 @@
               <a:rPr lang="zh-CN" altLang="en-US"/>
               <a:t>三级</a:t>
             </a:r>
-            <a:endParaRPr lang="zh-CN" altLang="en-US"/>
           </a:p>
           <a:p>
             <a:pPr lvl="3"/>
@@ -556,7 +553,6 @@
               <a:rPr lang="zh-CN" altLang="en-US"/>
               <a:t>四级</a:t>
             </a:r>
-            <a:endParaRPr lang="zh-CN" altLang="en-US"/>
           </a:p>
           <a:p>
             <a:pPr lvl="4"/>
@@ -564,7 +560,6 @@
               <a:rPr lang="zh-CN" altLang="en-US"/>
               <a:t>五级</a:t>
             </a:r>
-            <a:endParaRPr lang="zh-CN" altLang="en-US"/>
           </a:p>
         </p:txBody>
       </p:sp>
@@ -585,6 +580,7 @@
           <a:p>
             <a:fld id="{8E30BAFC-7326-4899-9BEC-7E31906EAAB6}" type="datetimeFigureOut">
               <a:rPr lang="zh-CN" altLang="en-US" smtClean="0"/>
+              <a:t>2026/8/21</a:t>
             </a:fld>
             <a:endParaRPr lang="zh-CN" altLang="en-US"/>
           </a:p>
@@ -626,6 +622,7 @@
           <a:p>
             <a:fld id="{BA48170D-50DB-4052-9D2B-D15E249EAEF9}" type="slidenum">
               <a:rPr lang="zh-CN" altLang="en-US" smtClean="0"/>
+              <a:t>‹#›</a:t>
             </a:fld>
             <a:endParaRPr lang="zh-CN" altLang="en-US"/>
           </a:p>
@@ -675,7 +672,6 @@
               <a:rPr lang="zh-CN" altLang="en-US"/>
               <a:t>单击此处编辑母版标题样式</a:t>
             </a:r>
-            <a:endParaRPr lang="zh-CN" altLang="en-US"/>
           </a:p>
         </p:txBody>
       </p:sp>
@@ -699,7 +695,6 @@
               <a:rPr lang="zh-CN" altLang="en-US"/>
               <a:t>单击此处编辑母版文本样式</a:t>
             </a:r>
-            <a:endParaRPr lang="zh-CN" altLang="en-US"/>
           </a:p>
           <a:p>
             <a:pPr lvl="1"/>
@@ -707,7 +702,6 @@
               <a:rPr lang="zh-CN" altLang="en-US"/>
               <a:t>二级</a:t>
             </a:r>
-            <a:endParaRPr lang="zh-CN" altLang="en-US"/>
           </a:p>
           <a:p>
             <a:pPr lvl="2"/>
@@ -715,7 +709,6 @@
               <a:rPr lang="zh-CN" altLang="en-US"/>
               <a:t>三级</a:t>
             </a:r>
-            <a:endParaRPr lang="zh-CN" altLang="en-US"/>
           </a:p>
           <a:p>
             <a:pPr lvl="3"/>
@@ -723,7 +716,6 @@
               <a:rPr lang="zh-CN" altLang="en-US"/>
               <a:t>四级</a:t>
             </a:r>
-            <a:endParaRPr lang="zh-CN" altLang="en-US"/>
           </a:p>
           <a:p>
             <a:pPr lvl="4"/>
@@ -731,7 +723,6 @@
               <a:rPr lang="zh-CN" altLang="en-US"/>
               <a:t>五级</a:t>
             </a:r>
-            <a:endParaRPr lang="zh-CN" altLang="en-US"/>
           </a:p>
         </p:txBody>
       </p:sp>
@@ -752,6 +743,7 @@
           <a:p>
             <a:fld id="{8E30BAFC-7326-4899-9BEC-7E31906EAAB6}" type="datetimeFigureOut">
               <a:rPr lang="zh-CN" altLang="en-US" smtClean="0"/>
+              <a:t>2026/8/21</a:t>
             </a:fld>
             <a:endParaRPr lang="zh-CN" altLang="en-US"/>
           </a:p>
@@ -793,6 +785,7 @@
           <a:p>
             <a:fld id="{BA48170D-50DB-4052-9D2B-D15E249EAEF9}" type="slidenum">
               <a:rPr lang="zh-CN" altLang="en-US" smtClean="0"/>
+              <a:t>‹#›</a:t>
             </a:fld>
             <a:endParaRPr lang="zh-CN" altLang="en-US"/>
           </a:p>
@@ -851,7 +844,6 @@
               <a:rPr lang="zh-CN" altLang="en-US"/>
               <a:t>单击此处编辑母版标题样式</a:t>
             </a:r>
-            <a:endParaRPr lang="zh-CN" altLang="en-US"/>
           </a:p>
         </p:txBody>
       </p:sp>
@@ -971,7 +963,6 @@
               <a:rPr lang="zh-CN" altLang="en-US"/>
               <a:t>单击此处编辑母版文本样式</a:t>
             </a:r>
-            <a:endParaRPr lang="zh-CN" altLang="en-US"/>
           </a:p>
         </p:txBody>
       </p:sp>
@@ -992,6 +983,7 @@
           <a:p>
             <a:fld id="{8E30BAFC-7326-4899-9BEC-7E31906EAAB6}" type="datetimeFigureOut">
               <a:rPr lang="zh-CN" altLang="en-US" smtClean="0"/>
+              <a:t>2026/8/21</a:t>
             </a:fld>
             <a:endParaRPr lang="zh-CN" altLang="en-US"/>
           </a:p>
@@ -1033,6 +1025,7 @@
           <a:p>
             <a:fld id="{BA48170D-50DB-4052-9D2B-D15E249EAEF9}" type="slidenum">
               <a:rPr lang="zh-CN" altLang="en-US" smtClean="0"/>
+              <a:t>‹#›</a:t>
             </a:fld>
             <a:endParaRPr lang="zh-CN" altLang="en-US"/>
           </a:p>
@@ -1082,7 +1075,6 @@
               <a:rPr lang="zh-CN" altLang="en-US"/>
               <a:t>单击此处编辑母版标题样式</a:t>
             </a:r>
-            <a:endParaRPr lang="zh-CN" altLang="en-US"/>
           </a:p>
         </p:txBody>
       </p:sp>
@@ -1111,7 +1103,6 @@
               <a:rPr lang="zh-CN" altLang="en-US"/>
               <a:t>单击此处编辑母版文本样式</a:t>
             </a:r>
-            <a:endParaRPr lang="zh-CN" altLang="en-US"/>
           </a:p>
           <a:p>
             <a:pPr lvl="1"/>
@@ -1119,7 +1110,6 @@
               <a:rPr lang="zh-CN" altLang="en-US"/>
               <a:t>二级</a:t>
             </a:r>
-            <a:endParaRPr lang="zh-CN" altLang="en-US"/>
           </a:p>
           <a:p>
             <a:pPr lvl="2"/>
@@ -1127,7 +1117,6 @@
               <a:rPr lang="zh-CN" altLang="en-US"/>
               <a:t>三级</a:t>
             </a:r>
-            <a:endParaRPr lang="zh-CN" altLang="en-US"/>
           </a:p>
           <a:p>
             <a:pPr lvl="3"/>
@@ -1135,7 +1124,6 @@
               <a:rPr lang="zh-CN" altLang="en-US"/>
               <a:t>四级</a:t>
             </a:r>
-            <a:endParaRPr lang="zh-CN" altLang="en-US"/>
           </a:p>
           <a:p>
             <a:pPr lvl="4"/>
@@ -1143,7 +1131,6 @@
               <a:rPr lang="zh-CN" altLang="en-US"/>
               <a:t>五级</a:t>
             </a:r>
-            <a:endParaRPr lang="zh-CN" altLang="en-US"/>
           </a:p>
         </p:txBody>
       </p:sp>
@@ -1172,7 +1159,6 @@
               <a:rPr lang="zh-CN" altLang="en-US"/>
               <a:t>单击此处编辑母版文本样式</a:t>
             </a:r>
-            <a:endParaRPr lang="zh-CN" altLang="en-US"/>
           </a:p>
           <a:p>
             <a:pPr lvl="1"/>
@@ -1180,7 +1166,6 @@
               <a:rPr lang="zh-CN" altLang="en-US"/>
               <a:t>二级</a:t>
             </a:r>
-            <a:endParaRPr lang="zh-CN" altLang="en-US"/>
           </a:p>
           <a:p>
             <a:pPr lvl="2"/>
@@ -1188,7 +1173,6 @@
               <a:rPr lang="zh-CN" altLang="en-US"/>
               <a:t>三级</a:t>
             </a:r>
-            <a:endParaRPr lang="zh-CN" altLang="en-US"/>
           </a:p>
           <a:p>
             <a:pPr lvl="3"/>
@@ -1196,7 +1180,6 @@
               <a:rPr lang="zh-CN" altLang="en-US"/>
               <a:t>四级</a:t>
             </a:r>
-            <a:endParaRPr lang="zh-CN" altLang="en-US"/>
           </a:p>
           <a:p>
             <a:pPr lvl="4"/>
@@ -1204,7 +1187,6 @@
               <a:rPr lang="zh-CN" altLang="en-US"/>
               <a:t>五级</a:t>
             </a:r>
-            <a:endParaRPr lang="zh-CN" altLang="en-US"/>
           </a:p>
         </p:txBody>
       </p:sp>
@@ -1225,6 +1207,7 @@
           <a:p>
             <a:fld id="{8E30BAFC-7326-4899-9BEC-7E31906EAAB6}" type="datetimeFigureOut">
               <a:rPr lang="zh-CN" altLang="en-US" smtClean="0"/>
+              <a:t>2026/8/21</a:t>
             </a:fld>
             <a:endParaRPr lang="zh-CN" altLang="en-US"/>
           </a:p>
@@ -1266,6 +1249,7 @@
           <a:p>
             <a:fld id="{BA48170D-50DB-4052-9D2B-D15E249EAEF9}" type="slidenum">
               <a:rPr lang="zh-CN" altLang="en-US" smtClean="0"/>
+              <a:t>‹#›</a:t>
             </a:fld>
             <a:endParaRPr lang="zh-CN" altLang="en-US"/>
           </a:p>
@@ -1320,7 +1304,6 @@
               <a:rPr lang="zh-CN" altLang="en-US"/>
               <a:t>单击此处编辑母版标题样式</a:t>
             </a:r>
-            <a:endParaRPr lang="zh-CN" altLang="en-US"/>
           </a:p>
         </p:txBody>
       </p:sp>
@@ -1386,7 +1369,6 @@
               <a:rPr lang="zh-CN" altLang="en-US"/>
               <a:t>单击此处编辑母版文本样式</a:t>
             </a:r>
-            <a:endParaRPr lang="zh-CN" altLang="en-US"/>
           </a:p>
         </p:txBody>
       </p:sp>
@@ -1415,7 +1397,6 @@
               <a:rPr lang="zh-CN" altLang="en-US"/>
               <a:t>单击此处编辑母版文本样式</a:t>
             </a:r>
-            <a:endParaRPr lang="zh-CN" altLang="en-US"/>
           </a:p>
           <a:p>
             <a:pPr lvl="1"/>
@@ -1423,7 +1404,6 @@
               <a:rPr lang="zh-CN" altLang="en-US"/>
               <a:t>二级</a:t>
             </a:r>
-            <a:endParaRPr lang="zh-CN" altLang="en-US"/>
           </a:p>
           <a:p>
             <a:pPr lvl="2"/>
@@ -1431,7 +1411,6 @@
               <a:rPr lang="zh-CN" altLang="en-US"/>
               <a:t>三级</a:t>
             </a:r>
-            <a:endParaRPr lang="zh-CN" altLang="en-US"/>
           </a:p>
           <a:p>
             <a:pPr lvl="3"/>
@@ -1439,7 +1418,6 @@
               <a:rPr lang="zh-CN" altLang="en-US"/>
               <a:t>四级</a:t>
             </a:r>
-            <a:endParaRPr lang="zh-CN" altLang="en-US"/>
           </a:p>
           <a:p>
             <a:pPr lvl="4"/>
@@ -1447,7 +1425,6 @@
               <a:rPr lang="zh-CN" altLang="en-US"/>
               <a:t>五级</a:t>
             </a:r>
-            <a:endParaRPr lang="zh-CN" altLang="en-US"/>
           </a:p>
         </p:txBody>
       </p:sp>
@@ -1513,7 +1490,6 @@
               <a:rPr lang="zh-CN" altLang="en-US"/>
               <a:t>单击此处编辑母版文本样式</a:t>
             </a:r>
-            <a:endParaRPr lang="zh-CN" altLang="en-US"/>
           </a:p>
         </p:txBody>
       </p:sp>
@@ -1542,7 +1518,6 @@
               <a:rPr lang="zh-CN" altLang="en-US"/>
               <a:t>单击此处编辑母版文本样式</a:t>
             </a:r>
-            <a:endParaRPr lang="zh-CN" altLang="en-US"/>
           </a:p>
           <a:p>
             <a:pPr lvl="1"/>
@@ -1550,7 +1525,6 @@
               <a:rPr lang="zh-CN" altLang="en-US"/>
               <a:t>二级</a:t>
             </a:r>
-            <a:endParaRPr lang="zh-CN" altLang="en-US"/>
           </a:p>
           <a:p>
             <a:pPr lvl="2"/>
@@ -1558,7 +1532,6 @@
               <a:rPr lang="zh-CN" altLang="en-US"/>
               <a:t>三级</a:t>
             </a:r>
-            <a:endParaRPr lang="zh-CN" altLang="en-US"/>
           </a:p>
           <a:p>
             <a:pPr lvl="3"/>
@@ -1566,7 +1539,6 @@
               <a:rPr lang="zh-CN" altLang="en-US"/>
               <a:t>四级</a:t>
             </a:r>
-            <a:endParaRPr lang="zh-CN" altLang="en-US"/>
           </a:p>
           <a:p>
             <a:pPr lvl="4"/>
@@ -1574,7 +1546,6 @@
               <a:rPr lang="zh-CN" altLang="en-US"/>
               <a:t>五级</a:t>
             </a:r>
-            <a:endParaRPr lang="zh-CN" altLang="en-US"/>
           </a:p>
         </p:txBody>
       </p:sp>
@@ -1595,6 +1566,7 @@
           <a:p>
             <a:fld id="{8E30BAFC-7326-4899-9BEC-7E31906EAAB6}" type="datetimeFigureOut">
               <a:rPr lang="zh-CN" altLang="en-US" smtClean="0"/>
+              <a:t>2026/8/21</a:t>
             </a:fld>
             <a:endParaRPr lang="zh-CN" altLang="en-US"/>
           </a:p>
@@ -1636,6 +1608,7 @@
           <a:p>
             <a:fld id="{BA48170D-50DB-4052-9D2B-D15E249EAEF9}" type="slidenum">
               <a:rPr lang="zh-CN" altLang="en-US" smtClean="0"/>
+              <a:t>‹#›</a:t>
             </a:fld>
             <a:endParaRPr lang="zh-CN" altLang="en-US"/>
           </a:p>
@@ -1685,7 +1658,6 @@
               <a:rPr lang="zh-CN" altLang="en-US"/>
               <a:t>单击此处编辑母版标题样式</a:t>
             </a:r>
-            <a:endParaRPr lang="zh-CN" altLang="en-US"/>
           </a:p>
         </p:txBody>
       </p:sp>
@@ -1706,6 +1678,7 @@
           <a:p>
             <a:fld id="{8E30BAFC-7326-4899-9BEC-7E31906EAAB6}" type="datetimeFigureOut">
               <a:rPr lang="zh-CN" altLang="en-US" smtClean="0"/>
+              <a:t>2026/8/21</a:t>
             </a:fld>
             <a:endParaRPr lang="zh-CN" altLang="en-US"/>
           </a:p>
@@ -1747,6 +1720,7 @@
           <a:p>
             <a:fld id="{BA48170D-50DB-4052-9D2B-D15E249EAEF9}" type="slidenum">
               <a:rPr lang="zh-CN" altLang="en-US" smtClean="0"/>
+              <a:t>‹#›</a:t>
             </a:fld>
             <a:endParaRPr lang="zh-CN" altLang="en-US"/>
           </a:p>
@@ -1794,6 +1768,7 @@
           <a:p>
             <a:fld id="{8E30BAFC-7326-4899-9BEC-7E31906EAAB6}" type="datetimeFigureOut">
               <a:rPr lang="zh-CN" altLang="en-US" smtClean="0"/>
+              <a:t>2026/8/21</a:t>
             </a:fld>
             <a:endParaRPr lang="zh-CN" altLang="en-US"/>
           </a:p>
@@ -1835,6 +1810,7 @@
           <a:p>
             <a:fld id="{BA48170D-50DB-4052-9D2B-D15E249EAEF9}" type="slidenum">
               <a:rPr lang="zh-CN" altLang="en-US" smtClean="0"/>
+              <a:t>‹#›</a:t>
             </a:fld>
             <a:endParaRPr lang="zh-CN" altLang="en-US"/>
           </a:p>
@@ -1893,7 +1869,6 @@
               <a:rPr lang="zh-CN" altLang="en-US"/>
               <a:t>单击此处编辑母版标题样式</a:t>
             </a:r>
-            <a:endParaRPr lang="zh-CN" altLang="en-US"/>
           </a:p>
         </p:txBody>
       </p:sp>
@@ -1950,7 +1925,6 @@
               <a:rPr lang="zh-CN" altLang="en-US"/>
               <a:t>单击此处编辑母版文本样式</a:t>
             </a:r>
-            <a:endParaRPr lang="zh-CN" altLang="en-US"/>
           </a:p>
           <a:p>
             <a:pPr lvl="1"/>
@@ -1958,7 +1932,6 @@
               <a:rPr lang="zh-CN" altLang="en-US"/>
               <a:t>二级</a:t>
             </a:r>
-            <a:endParaRPr lang="zh-CN" altLang="en-US"/>
           </a:p>
           <a:p>
             <a:pPr lvl="2"/>
@@ -1966,7 +1939,6 @@
               <a:rPr lang="zh-CN" altLang="en-US"/>
               <a:t>三级</a:t>
             </a:r>
-            <a:endParaRPr lang="zh-CN" altLang="en-US"/>
           </a:p>
           <a:p>
             <a:pPr lvl="3"/>
@@ -1974,7 +1946,6 @@
               <a:rPr lang="zh-CN" altLang="en-US"/>
               <a:t>四级</a:t>
             </a:r>
-            <a:endParaRPr lang="zh-CN" altLang="en-US"/>
           </a:p>
           <a:p>
             <a:pPr lvl="4"/>
@@ -1982,7 +1953,6 @@
               <a:rPr lang="zh-CN" altLang="en-US"/>
               <a:t>五级</a:t>
             </a:r>
-            <a:endParaRPr lang="zh-CN" altLang="en-US"/>
           </a:p>
         </p:txBody>
       </p:sp>
@@ -2048,7 +2018,6 @@
               <a:rPr lang="zh-CN" altLang="en-US"/>
               <a:t>单击此处编辑母版文本样式</a:t>
             </a:r>
-            <a:endParaRPr lang="zh-CN" altLang="en-US"/>
           </a:p>
         </p:txBody>
       </p:sp>
@@ -2069,6 +2038,7 @@
           <a:p>
             <a:fld id="{8E30BAFC-7326-4899-9BEC-7E31906EAAB6}" type="datetimeFigureOut">
               <a:rPr lang="zh-CN" altLang="en-US" smtClean="0"/>
+              <a:t>2026/8/21</a:t>
             </a:fld>
             <a:endParaRPr lang="zh-CN" altLang="en-US"/>
           </a:p>
@@ -2110,6 +2080,7 @@
           <a:p>
             <a:fld id="{BA48170D-50DB-4052-9D2B-D15E249EAEF9}" type="slidenum">
               <a:rPr lang="zh-CN" altLang="en-US" smtClean="0"/>
+              <a:t>‹#›</a:t>
             </a:fld>
             <a:endParaRPr lang="zh-CN" altLang="en-US"/>
           </a:p>
@@ -2168,7 +2139,6 @@
               <a:rPr lang="zh-CN" altLang="en-US"/>
               <a:t>单击此处编辑母版标题样式</a:t>
             </a:r>
-            <a:endParaRPr lang="zh-CN" altLang="en-US"/>
           </a:p>
         </p:txBody>
       </p:sp>
@@ -2295,7 +2265,6 @@
               <a:rPr lang="zh-CN" altLang="en-US"/>
               <a:t>单击此处编辑母版文本样式</a:t>
             </a:r>
-            <a:endParaRPr lang="zh-CN" altLang="en-US"/>
           </a:p>
         </p:txBody>
       </p:sp>
@@ -2316,6 +2285,7 @@
           <a:p>
             <a:fld id="{8E30BAFC-7326-4899-9BEC-7E31906EAAB6}" type="datetimeFigureOut">
               <a:rPr lang="zh-CN" altLang="en-US" smtClean="0"/>
+              <a:t>2026/8/21</a:t>
             </a:fld>
             <a:endParaRPr lang="zh-CN" altLang="en-US"/>
           </a:p>
@@ -2357,6 +2327,7 @@
           <a:p>
             <a:fld id="{BA48170D-50DB-4052-9D2B-D15E249EAEF9}" type="slidenum">
               <a:rPr lang="zh-CN" altLang="en-US" smtClean="0"/>
+              <a:t>‹#›</a:t>
             </a:fld>
             <a:endParaRPr lang="zh-CN" altLang="en-US"/>
           </a:p>
@@ -2421,7 +2392,6 @@
               <a:rPr lang="zh-CN" altLang="en-US"/>
               <a:t>单击此处编辑母版标题样式</a:t>
             </a:r>
-            <a:endParaRPr lang="zh-CN" altLang="en-US"/>
           </a:p>
         </p:txBody>
       </p:sp>
@@ -2455,7 +2425,6 @@
               <a:rPr lang="zh-CN" altLang="en-US"/>
               <a:t>单击此处编辑母版文本样式</a:t>
             </a:r>
-            <a:endParaRPr lang="zh-CN" altLang="en-US"/>
           </a:p>
           <a:p>
             <a:pPr lvl="1"/>
@@ -2463,7 +2432,6 @@
               <a:rPr lang="zh-CN" altLang="en-US"/>
               <a:t>二级</a:t>
             </a:r>
-            <a:endParaRPr lang="zh-CN" altLang="en-US"/>
           </a:p>
           <a:p>
             <a:pPr lvl="2"/>
@@ -2471,7 +2439,6 @@
               <a:rPr lang="zh-CN" altLang="en-US"/>
               <a:t>三级</a:t>
             </a:r>
-            <a:endParaRPr lang="zh-CN" altLang="en-US"/>
           </a:p>
           <a:p>
             <a:pPr lvl="3"/>
@@ -2479,7 +2446,6 @@
               <a:rPr lang="zh-CN" altLang="en-US"/>
               <a:t>四级</a:t>
             </a:r>
-            <a:endParaRPr lang="zh-CN" altLang="en-US"/>
           </a:p>
           <a:p>
             <a:pPr lvl="4"/>
@@ -2487,7 +2453,6 @@
               <a:rPr lang="zh-CN" altLang="en-US"/>
               <a:t>五级</a:t>
             </a:r>
-            <a:endParaRPr lang="zh-CN" altLang="en-US"/>
           </a:p>
         </p:txBody>
       </p:sp>
@@ -2526,6 +2491,7 @@
           <a:p>
             <a:fld id="{8E30BAFC-7326-4899-9BEC-7E31906EAAB6}" type="datetimeFigureOut">
               <a:rPr lang="zh-CN" altLang="en-US" smtClean="0"/>
+              <a:t>2026/8/21</a:t>
             </a:fld>
             <a:endParaRPr lang="zh-CN" altLang="en-US"/>
           </a:p>
@@ -2603,6 +2569,7 @@
           <a:p>
             <a:fld id="{BA48170D-50DB-4052-9D2B-D15E249EAEF9}" type="slidenum">
               <a:rPr lang="zh-CN" altLang="en-US" smtClean="0"/>
+              <a:t>‹#›</a:t>
             </a:fld>
             <a:endParaRPr lang="zh-CN" altLang="en-US"/>
           </a:p>
@@ -2913,7 +2880,7 @@
     <p:bg>
       <p:bgPr>
         <a:blipFill dpi="0" rotWithShape="1">
-          <a:blip r:embed="rId1">
+          <a:blip r:embed="rId2">
             <a:lum/>
           </a:blip>
           <a:srcRect/>
@@ -2947,7 +2914,7 @@
         <p:spPr>
           <a:xfrm>
             <a:off x="620201" y="6130454"/>
-            <a:ext cx="1547218" cy="246221"/>
+            <a:ext cx="1745991" cy="246221"/>
           </a:xfrm>
           <a:prstGeom prst="rect">
             <a:avLst/>
@@ -2967,8 +2934,8 @@
                     <a:lumMod val="50000"/>
                   </a:schemeClr>
                 </a:solidFill>
-                <a:latin typeface="+mj-ea"/>
-                <a:ea typeface="+mj-ea"/>
+                <a:latin typeface="微软雅黑" panose="020B0503020204020204" pitchFamily="34" charset="-122"/>
+                <a:ea typeface="微软雅黑" panose="020B0503020204020204" pitchFamily="34" charset="-122"/>
                 <a:cs typeface="Arial" panose="02080604020202020204" pitchFamily="34" charset="0"/>
               </a:rPr>
               <a:t>https://gitcode.com/cann</a:t>
@@ -2979,8 +2946,8 @@
                   <a:lumMod val="50000"/>
                 </a:schemeClr>
               </a:solidFill>
-              <a:latin typeface="+mj-ea"/>
-              <a:ea typeface="+mj-ea"/>
+              <a:latin typeface="微软雅黑" panose="020B0503020204020204" pitchFamily="34" charset="-122"/>
+              <a:ea typeface="微软雅黑" panose="020B0503020204020204" pitchFamily="34" charset="-122"/>
               <a:cs typeface="Arial" panose="02080604020202020204" pitchFamily="34" charset="0"/>
             </a:endParaRPr>
           </a:p>
@@ -2988,14 +2955,20 @@
       </p:sp>
       <p:sp>
         <p:nvSpPr>
-          <p:cNvPr id="2" name="文本框 1"/>
+          <p:cNvPr id="4" name="文本框 3">
+            <a:extLst>
+              <a:ext uri="{FF2B5EF4-FFF2-40B4-BE49-F238E27FC236}">
+                <a16:creationId xmlns:a16="http://schemas.microsoft.com/office/drawing/2014/main" id="{AB38D0F8-B5D4-1CA8-97D3-9FEACBDF53FA}"/>
+              </a:ext>
+            </a:extLst>
+          </p:cNvPr>
           <p:cNvSpPr txBox="1"/>
           <p:nvPr/>
         </p:nvSpPr>
         <p:spPr>
           <a:xfrm>
             <a:off x="1089947" y="1399429"/>
-            <a:ext cx="4932680" cy="706755"/>
+            <a:ext cx="5856090" cy="707886"/>
           </a:xfrm>
           <a:prstGeom prst="rect">
             <a:avLst/>
@@ -3013,14 +2986,31 @@
                 <a:latin typeface="微软雅黑" panose="020B0503020204020204" pitchFamily="34" charset="-122"/>
                 <a:ea typeface="微软雅黑" panose="020B0503020204020204" pitchFamily="34" charset="-122"/>
               </a:rPr>
-              <a:t>CANN</a:t>
+              <a:t>C</a:t>
+            </a:r>
+            <a:r>
+              <a:rPr lang="en-US" altLang="zh-CN" sz="4000" b="1" dirty="0">
+                <a:solidFill>
+                  <a:srgbClr val="C00000"/>
+                </a:solidFill>
+                <a:latin typeface="微软雅黑" panose="020B0503020204020204" pitchFamily="34" charset="-122"/>
+                <a:ea typeface="微软雅黑" panose="020B0503020204020204" pitchFamily="34" charset="-122"/>
+              </a:rPr>
+              <a:t>A</a:t>
+            </a:r>
+            <a:r>
+              <a:rPr lang="en-US" altLang="zh-CN" sz="4000" b="1" dirty="0">
+                <a:latin typeface="微软雅黑" panose="020B0503020204020204" pitchFamily="34" charset="-122"/>
+                <a:ea typeface="微软雅黑" panose="020B0503020204020204" pitchFamily="34" charset="-122"/>
+              </a:rPr>
+              <a:t>NN</a:t>
             </a:r>
             <a:r>
               <a:rPr lang="zh-CN" altLang="en-US" sz="4000" b="1" dirty="0">
                 <a:latin typeface="微软雅黑" panose="020B0503020204020204" pitchFamily="34" charset="-122"/>
                 <a:ea typeface="微软雅黑" panose="020B0503020204020204" pitchFamily="34" charset="-122"/>
               </a:rPr>
-              <a:t>社区</a:t>
+              <a:t>开源社区</a:t>
             </a:r>
             <a:r>
               <a:rPr lang="en-US" altLang="zh-CN" sz="4000" b="1" dirty="0">
@@ -3036,23 +3026,25 @@
               </a:rPr>
               <a:t>模板</a:t>
             </a:r>
-            <a:endParaRPr lang="zh-CN" altLang="en-US" sz="4000" b="1" dirty="0">
-              <a:latin typeface="微软雅黑" panose="020B0503020204020204" pitchFamily="34" charset="-122"/>
-              <a:ea typeface="微软雅黑" panose="020B0503020204020204" pitchFamily="34" charset="-122"/>
-            </a:endParaRPr>
-          </a:p>
-        </p:txBody>
-      </p:sp>
-      <p:sp>
-        <p:nvSpPr>
-          <p:cNvPr id="3" name="文本框 2"/>
+          </a:p>
+        </p:txBody>
+      </p:sp>
+      <p:sp>
+        <p:nvSpPr>
+          <p:cNvPr id="6" name="文本框 5">
+            <a:extLst>
+              <a:ext uri="{FF2B5EF4-FFF2-40B4-BE49-F238E27FC236}">
+                <a16:creationId xmlns:a16="http://schemas.microsoft.com/office/drawing/2014/main" id="{634A04A8-14A4-C9FE-3EE8-8B8B6E6FE0BD}"/>
+              </a:ext>
+            </a:extLst>
+          </p:cNvPr>
           <p:cNvSpPr txBox="1"/>
           <p:nvPr/>
         </p:nvSpPr>
         <p:spPr>
           <a:xfrm>
             <a:off x="1176792" y="2313830"/>
-            <a:ext cx="591820" cy="829945"/>
+            <a:ext cx="595035" cy="787523"/>
           </a:xfrm>
           <a:prstGeom prst="rect">
             <a:avLst/>
@@ -3077,10 +3069,6 @@
               </a:rPr>
               <a:t>作者</a:t>
             </a:r>
-            <a:endParaRPr lang="en-US" altLang="zh-CN" sz="1600" b="1" dirty="0">
-              <a:latin typeface="微软雅黑" panose="020B0503020204020204" pitchFamily="34" charset="-122"/>
-              <a:ea typeface="微软雅黑" panose="020B0503020204020204" pitchFamily="34" charset="-122"/>
-            </a:endParaRPr>
           </a:p>
           <a:p>
             <a:pPr>
@@ -3095,10 +3083,6 @@
               </a:rPr>
               <a:t>时间</a:t>
             </a:r>
-            <a:endParaRPr lang="en-US" altLang="zh-CN" sz="1600" b="1" dirty="0">
-              <a:latin typeface="微软雅黑" panose="020B0503020204020204" pitchFamily="34" charset="-122"/>
-              <a:ea typeface="微软雅黑" panose="020B0503020204020204" pitchFamily="34" charset="-122"/>
-            </a:endParaRPr>
           </a:p>
         </p:txBody>
       </p:sp>
@@ -3185,29 +3169,11 @@
                 <a:uLnTx/>
                 <a:uFillTx/>
                 <a:latin typeface="微软雅黑" panose="020B0503020204020204" pitchFamily="34" charset="-122"/>
-                <a:ea typeface="微软雅黑"/>
-                <a:cs typeface="+mn-cs"/>
+                <a:ea typeface="微软雅黑" panose="020B0503020204020204" pitchFamily="34" charset="-122"/>
                 <a:sym typeface="微软雅黑" panose="020B0503020204020204" pitchFamily="34" charset="-122"/>
               </a:rPr>
               <a:t>目录</a:t>
             </a:r>
-            <a:endParaRPr kumimoji="0" lang="zh-CN" altLang="en-US" sz="4800" b="0" i="0" u="none" strike="noStrike" kern="0" cap="none" spc="0" normalizeH="0" baseline="0" noProof="0" dirty="0">
-              <a:ln>
-                <a:noFill/>
-              </a:ln>
-              <a:solidFill>
-                <a:srgbClr val="DDDDDD">
-                  <a:lumMod val="50000"/>
-                </a:srgbClr>
-              </a:solidFill>
-              <a:effectLst/>
-              <a:uLnTx/>
-              <a:uFillTx/>
-              <a:latin typeface="微软雅黑" panose="020B0503020204020204" pitchFamily="34" charset="-122"/>
-              <a:ea typeface="微软雅黑"/>
-              <a:cs typeface="+mn-cs"/>
-              <a:sym typeface="微软雅黑" panose="020B0503020204020204" pitchFamily="34" charset="-122"/>
-            </a:endParaRPr>
           </a:p>
         </p:txBody>
       </p:sp>
@@ -3266,7 +3232,7 @@
                     <a:schemeClr val="bg1"/>
                   </a:solidFill>
                   <a:latin typeface="微软雅黑" panose="020B0503020204020204" pitchFamily="34" charset="-122"/>
-                  <a:ea typeface="微软雅黑"/>
+                  <a:ea typeface="微软雅黑" panose="020B0503020204020204" pitchFamily="34" charset="-122"/>
                 </a:rPr>
                 <a:t>Part 1 XXXX</a:t>
               </a:r>
@@ -3275,7 +3241,7 @@
                   <a:schemeClr val="bg1"/>
                 </a:solidFill>
                 <a:latin typeface="微软雅黑" panose="020B0503020204020204" pitchFamily="34" charset="-122"/>
-                <a:ea typeface="微软雅黑"/>
+                <a:ea typeface="微软雅黑" panose="020B0503020204020204" pitchFamily="34" charset="-122"/>
               </a:endParaRPr>
             </a:p>
           </p:txBody>
@@ -3346,8 +3312,7 @@
                   <a:uLnTx/>
                   <a:uFillTx/>
                   <a:latin typeface="微软雅黑" panose="020B0503020204020204" pitchFamily="34" charset="-122"/>
-                  <a:ea typeface="微软雅黑"/>
-                  <a:cs typeface="+mn-cs"/>
+                  <a:ea typeface="微软雅黑" panose="020B0503020204020204" pitchFamily="34" charset="-122"/>
                 </a:rPr>
                 <a:t>Part 2 XXXX</a:t>
               </a:r>
@@ -3364,8 +3329,7 @@
                 <a:uLnTx/>
                 <a:uFillTx/>
                 <a:latin typeface="微软雅黑" panose="020B0503020204020204" pitchFamily="34" charset="-122"/>
-                <a:ea typeface="微软雅黑"/>
-                <a:cs typeface="+mn-cs"/>
+                <a:ea typeface="微软雅黑" panose="020B0503020204020204" pitchFamily="34" charset="-122"/>
               </a:endParaRPr>
             </a:p>
           </p:txBody>
@@ -3415,7 +3379,7 @@
                     </a:srgbClr>
                   </a:solidFill>
                   <a:latin typeface="微软雅黑" panose="020B0503020204020204" pitchFamily="34" charset="-122"/>
-                  <a:ea typeface="微软雅黑"/>
+                  <a:ea typeface="微软雅黑" panose="020B0503020204020204" pitchFamily="34" charset="-122"/>
                 </a:rPr>
                 <a:t>Part 3 XXXX</a:t>
               </a:r>
@@ -3426,7 +3390,7 @@
                   </a:srgbClr>
                 </a:solidFill>
                 <a:latin typeface="微软雅黑" panose="020B0503020204020204" pitchFamily="34" charset="-122"/>
-                <a:ea typeface="微软雅黑"/>
+                <a:ea typeface="微软雅黑" panose="020B0503020204020204" pitchFamily="34" charset="-122"/>
               </a:endParaRPr>
             </a:p>
           </p:txBody>
@@ -3472,7 +3436,7 @@
           <p:nvPr/>
         </p:nvPicPr>
         <p:blipFill>
-          <a:blip r:embed="rId1">
+          <a:blip r:embed="rId2" cstate="print">
             <a:extLst>
               <a:ext uri="{28A0092B-C50C-407E-A947-70E740481C1C}">
                 <a14:useLocalDpi xmlns:a14="http://schemas.microsoft.com/office/drawing/2010/main" val="0"/>
@@ -3502,7 +3466,7 @@
         <p:spPr>
           <a:xfrm>
             <a:off x="620201" y="6130454"/>
-            <a:ext cx="1547218" cy="246221"/>
+            <a:ext cx="1745991" cy="246221"/>
           </a:xfrm>
           <a:prstGeom prst="rect">
             <a:avLst/>
@@ -3522,8 +3486,8 @@
                     <a:lumMod val="50000"/>
                   </a:schemeClr>
                 </a:solidFill>
-                <a:latin typeface="+mj-ea"/>
-                <a:ea typeface="+mj-ea"/>
+                <a:latin typeface="微软雅黑" panose="020B0503020204020204" pitchFamily="34" charset="-122"/>
+                <a:ea typeface="微软雅黑" panose="020B0503020204020204" pitchFamily="34" charset="-122"/>
                 <a:cs typeface="Arial" panose="02080604020202020204" pitchFamily="34" charset="0"/>
               </a:rPr>
               <a:t>https://gitcode.com/cann</a:t>
@@ -3534,8 +3498,8 @@
                   <a:lumMod val="50000"/>
                 </a:schemeClr>
               </a:solidFill>
-              <a:latin typeface="+mj-ea"/>
-              <a:ea typeface="+mj-ea"/>
+              <a:latin typeface="微软雅黑" panose="020B0503020204020204" pitchFamily="34" charset="-122"/>
+              <a:ea typeface="微软雅黑" panose="020B0503020204020204" pitchFamily="34" charset="-122"/>
               <a:cs typeface="Arial" panose="02080604020202020204" pitchFamily="34" charset="0"/>
             </a:endParaRPr>
           </a:p>
@@ -3575,7 +3539,7 @@
           <p:nvPr/>
         </p:nvPicPr>
         <p:blipFill>
-          <a:blip r:embed="rId1">
+          <a:blip r:embed="rId2" cstate="print">
             <a:extLst>
               <a:ext uri="{28A0092B-C50C-407E-A947-70E740481C1C}">
                 <a14:useLocalDpi xmlns:a14="http://schemas.microsoft.com/office/drawing/2010/main" val="0"/>
@@ -3605,7 +3569,7 @@
         <p:spPr>
           <a:xfrm>
             <a:off x="620201" y="6130454"/>
-            <a:ext cx="1547218" cy="246221"/>
+            <a:ext cx="1745991" cy="246221"/>
           </a:xfrm>
           <a:prstGeom prst="rect">
             <a:avLst/>
@@ -3625,8 +3589,8 @@
                     <a:lumMod val="50000"/>
                   </a:schemeClr>
                 </a:solidFill>
-                <a:latin typeface="+mj-ea"/>
-                <a:ea typeface="+mj-ea"/>
+                <a:latin typeface="微软雅黑" panose="020B0503020204020204" pitchFamily="34" charset="-122"/>
+                <a:ea typeface="微软雅黑" panose="020B0503020204020204" pitchFamily="34" charset="-122"/>
                 <a:cs typeface="Arial" panose="02080604020202020204" pitchFamily="34" charset="0"/>
               </a:rPr>
               <a:t>https://gitcode.com/cann</a:t>
@@ -3637,8 +3601,8 @@
                   <a:lumMod val="50000"/>
                 </a:schemeClr>
               </a:solidFill>
-              <a:latin typeface="+mj-ea"/>
-              <a:ea typeface="+mj-ea"/>
+              <a:latin typeface="微软雅黑" panose="020B0503020204020204" pitchFamily="34" charset="-122"/>
+              <a:ea typeface="微软雅黑" panose="020B0503020204020204" pitchFamily="34" charset="-122"/>
               <a:cs typeface="Arial" panose="02080604020202020204" pitchFamily="34" charset="0"/>
             </a:endParaRPr>
           </a:p>
@@ -3837,7 +3801,6 @@
                   <a:prstClr val="black"/>
                 </a:solidFill>
                 <a:latin typeface="微软雅黑" panose="020B0503020204020204" pitchFamily="34" charset="-122"/>
-                <a:ea typeface="微软雅黑" panose="020B0503020204020204" pitchFamily="34" charset="-122"/>
               </a:rPr>
               <a:t>标题模板</a:t>
             </a:r>
@@ -3847,7 +3810,6 @@
                   <a:prstClr val="black"/>
                 </a:solidFill>
                 <a:latin typeface="微软雅黑" panose="020B0503020204020204" pitchFamily="34" charset="-122"/>
-                <a:ea typeface="微软雅黑" panose="020B0503020204020204" pitchFamily="34" charset="-122"/>
               </a:rPr>
               <a:t>XXXXX</a:t>
             </a:r>
@@ -3855,6 +3817,7 @@
               <a:solidFill>
                 <a:prstClr val="black"/>
               </a:solidFill>
+              <a:latin typeface="微软雅黑" panose="020B0503020204020204" pitchFamily="34" charset="-122"/>
             </a:endParaRPr>
           </a:p>
         </p:txBody>
@@ -3893,7 +3856,7 @@
         <p:spPr>
           <a:xfrm>
             <a:off x="874644" y="1208599"/>
-            <a:ext cx="3608680" cy="923330"/>
+            <a:ext cx="3797322" cy="923330"/>
           </a:xfrm>
           <a:prstGeom prst="rect">
             <a:avLst/>
@@ -3908,280 +3871,20 @@
           <a:p>
             <a:r>
               <a:rPr lang="en-US" altLang="zh-CN" sz="5400" dirty="0">
-                <a:latin typeface="Arial" panose="02080604020202020204" pitchFamily="34" charset="0"/>
-                <a:cs typeface="Arial" panose="02080604020202020204" pitchFamily="34" charset="0"/>
+                <a:latin typeface="微软雅黑" panose="020B0503020204020204" pitchFamily="34" charset="-122"/>
+                <a:ea typeface="微软雅黑" panose="020B0503020204020204" pitchFamily="34" charset="-122"/>
+                <a:cs typeface="Arial" panose="020B0604020202020204" pitchFamily="34" charset="0"/>
               </a:rPr>
               <a:t>Thank you.</a:t>
             </a:r>
             <a:endParaRPr lang="zh-CN" altLang="en-US" sz="5400" dirty="0">
-              <a:latin typeface="Arial" panose="02080604020202020204" pitchFamily="34" charset="0"/>
-              <a:cs typeface="Arial" panose="02080604020202020204" pitchFamily="34" charset="0"/>
+              <a:latin typeface="微软雅黑" panose="020B0503020204020204" pitchFamily="34" charset="-122"/>
+              <a:ea typeface="微软雅黑" panose="020B0503020204020204" pitchFamily="34" charset="-122"/>
+              <a:cs typeface="Arial" panose="020B0604020202020204" pitchFamily="34" charset="0"/>
             </a:endParaRPr>
           </a:p>
         </p:txBody>
       </p:sp>
-      <p:sp>
-        <p:nvSpPr>
-          <p:cNvPr id="3" name="文本框 2"/>
-          <p:cNvSpPr txBox="1"/>
-          <p:nvPr/>
-        </p:nvSpPr>
-        <p:spPr>
-          <a:xfrm>
-            <a:off x="6400801" y="1393264"/>
-            <a:ext cx="4699220" cy="2325958"/>
-          </a:xfrm>
-          <a:prstGeom prst="rect">
-            <a:avLst/>
-          </a:prstGeom>
-          <a:noFill/>
-        </p:spPr>
-        <p:txBody>
-          <a:bodyPr wrap="square" rtlCol="0">
-            <a:spAutoFit/>
-          </a:bodyPr>
-          <a:lstStyle/>
-          <a:p>
-            <a:pPr>
-              <a:lnSpc>
-                <a:spcPct val="150000"/>
-              </a:lnSpc>
-            </a:pPr>
-            <a:r>
-              <a:rPr lang="zh-CN" altLang="en-US" sz="1200" dirty="0">
-                <a:solidFill>
-                  <a:schemeClr val="bg1">
-                    <a:lumMod val="50000"/>
-                  </a:schemeClr>
-                </a:solidFill>
-                <a:latin typeface="宋体" pitchFamily="2" charset="-122"/>
-                <a:ea typeface="宋体" pitchFamily="2" charset="-122"/>
-                <a:cs typeface="Arial" panose="02080604020202020204" pitchFamily="34" charset="0"/>
-              </a:rPr>
-              <a:t>社区愿景：打造开放易用、技术领先的</a:t>
-            </a:r>
-            <a:r>
-              <a:rPr lang="en-US" altLang="zh-CN" sz="1200" dirty="0">
-                <a:solidFill>
-                  <a:schemeClr val="bg1">
-                    <a:lumMod val="50000"/>
-                  </a:schemeClr>
-                </a:solidFill>
-                <a:latin typeface="宋体" pitchFamily="2" charset="-122"/>
-                <a:ea typeface="宋体" pitchFamily="2" charset="-122"/>
-                <a:cs typeface="Arial" panose="02080604020202020204" pitchFamily="34" charset="0"/>
-              </a:rPr>
-              <a:t>AI</a:t>
-            </a:r>
-            <a:r>
-              <a:rPr lang="zh-CN" altLang="en-US" sz="1200" dirty="0">
-                <a:solidFill>
-                  <a:schemeClr val="bg1">
-                    <a:lumMod val="50000"/>
-                  </a:schemeClr>
-                </a:solidFill>
-                <a:latin typeface="宋体" pitchFamily="2" charset="-122"/>
-                <a:ea typeface="宋体" pitchFamily="2" charset="-122"/>
-                <a:cs typeface="Arial" panose="02080604020202020204" pitchFamily="34" charset="0"/>
-              </a:rPr>
-              <a:t>算力新生态</a:t>
-            </a:r>
-            <a:endParaRPr lang="en-US" altLang="zh-CN" sz="1200" dirty="0">
-              <a:solidFill>
-                <a:schemeClr val="bg1">
-                  <a:lumMod val="50000"/>
-                </a:schemeClr>
-              </a:solidFill>
-              <a:latin typeface="宋体" pitchFamily="2" charset="-122"/>
-              <a:ea typeface="宋体" pitchFamily="2" charset="-122"/>
-              <a:cs typeface="Arial" panose="02080604020202020204" pitchFamily="34" charset="0"/>
-            </a:endParaRPr>
-          </a:p>
-          <a:p>
-            <a:pPr>
-              <a:lnSpc>
-                <a:spcPct val="150000"/>
-              </a:lnSpc>
-            </a:pPr>
-            <a:r>
-              <a:rPr lang="zh-CN" altLang="en-US" sz="1200" dirty="0">
-                <a:solidFill>
-                  <a:schemeClr val="bg1">
-                    <a:lumMod val="50000"/>
-                  </a:schemeClr>
-                </a:solidFill>
-                <a:latin typeface="宋体" pitchFamily="2" charset="-122"/>
-                <a:ea typeface="宋体" pitchFamily="2" charset="-122"/>
-                <a:cs typeface="Arial" panose="02080604020202020204" pitchFamily="34" charset="0"/>
-              </a:rPr>
-              <a:t>社区使命：使能开发者基于</a:t>
-            </a:r>
-            <a:r>
-              <a:rPr lang="en-US" altLang="zh-CN" sz="1200" dirty="0">
-                <a:solidFill>
-                  <a:schemeClr val="bg1">
-                    <a:lumMod val="50000"/>
-                  </a:schemeClr>
-                </a:solidFill>
-                <a:latin typeface="宋体" pitchFamily="2" charset="-122"/>
-                <a:ea typeface="宋体" pitchFamily="2" charset="-122"/>
-                <a:cs typeface="Arial" panose="02080604020202020204" pitchFamily="34" charset="0"/>
-              </a:rPr>
-              <a:t>CANN</a:t>
-            </a:r>
-            <a:r>
-              <a:rPr lang="zh-CN" altLang="en-US" sz="1200" dirty="0">
-                <a:solidFill>
-                  <a:schemeClr val="bg1">
-                    <a:lumMod val="50000"/>
-                  </a:schemeClr>
-                </a:solidFill>
-                <a:latin typeface="宋体" pitchFamily="2" charset="-122"/>
-                <a:ea typeface="宋体" pitchFamily="2" charset="-122"/>
-                <a:cs typeface="Arial" panose="02080604020202020204" pitchFamily="34" charset="0"/>
-              </a:rPr>
-              <a:t>社区自主研究创新，构筑根深叶茂、跨产业协同共享共赢的</a:t>
-            </a:r>
-            <a:r>
-              <a:rPr lang="en-US" altLang="zh-CN" sz="1200" dirty="0">
-                <a:solidFill>
-                  <a:schemeClr val="bg1">
-                    <a:lumMod val="50000"/>
-                  </a:schemeClr>
-                </a:solidFill>
-                <a:latin typeface="宋体" pitchFamily="2" charset="-122"/>
-                <a:ea typeface="宋体" pitchFamily="2" charset="-122"/>
-                <a:cs typeface="Arial" panose="02080604020202020204" pitchFamily="34" charset="0"/>
-              </a:rPr>
-              <a:t>CANN</a:t>
-            </a:r>
-            <a:r>
-              <a:rPr lang="zh-CN" altLang="en-US" sz="1200" dirty="0">
-                <a:solidFill>
-                  <a:schemeClr val="bg1">
-                    <a:lumMod val="50000"/>
-                  </a:schemeClr>
-                </a:solidFill>
-                <a:latin typeface="宋体" pitchFamily="2" charset="-122"/>
-                <a:ea typeface="宋体" pitchFamily="2" charset="-122"/>
-                <a:cs typeface="Arial" panose="02080604020202020204" pitchFamily="34" charset="0"/>
-              </a:rPr>
-              <a:t>生态</a:t>
-            </a:r>
-            <a:endParaRPr lang="en-US" altLang="zh-CN" sz="1200" dirty="0">
-              <a:solidFill>
-                <a:schemeClr val="bg1">
-                  <a:lumMod val="50000"/>
-                </a:schemeClr>
-              </a:solidFill>
-              <a:latin typeface="宋体" pitchFamily="2" charset="-122"/>
-              <a:ea typeface="宋体" pitchFamily="2" charset="-122"/>
-              <a:cs typeface="Arial" panose="02080604020202020204" pitchFamily="34" charset="0"/>
-            </a:endParaRPr>
-          </a:p>
-          <a:p>
-            <a:pPr>
-              <a:lnSpc>
-                <a:spcPct val="150000"/>
-              </a:lnSpc>
-            </a:pPr>
-            <a:endParaRPr lang="en-US" altLang="zh-CN" sz="1200" dirty="0">
-              <a:solidFill>
-                <a:schemeClr val="bg1">
-                  <a:lumMod val="50000"/>
-                </a:schemeClr>
-              </a:solidFill>
-              <a:latin typeface="+mn-ea"/>
-            </a:endParaRPr>
-          </a:p>
-          <a:p>
-            <a:pPr>
-              <a:lnSpc>
-                <a:spcPct val="150000"/>
-              </a:lnSpc>
-            </a:pPr>
-            <a:r>
-              <a:rPr lang="en-US" altLang="zh-CN" sz="1000" dirty="0">
-                <a:solidFill>
-                  <a:schemeClr val="bg1">
-                    <a:lumMod val="50000"/>
-                  </a:schemeClr>
-                </a:solidFill>
-                <a:latin typeface="Arial" panose="02080604020202020204" pitchFamily="34" charset="0"/>
-                <a:cs typeface="Arial" panose="02080604020202020204" pitchFamily="34" charset="0"/>
-              </a:rPr>
-              <a:t>Vision: Building an Open, Easy-to-Use, and Technology-leading AI Computing Ecosystem</a:t>
-            </a:r>
-            <a:endParaRPr lang="en-US" altLang="zh-CN" sz="1000" dirty="0">
-              <a:solidFill>
-                <a:schemeClr val="bg1">
-                  <a:lumMod val="50000"/>
-                </a:schemeClr>
-              </a:solidFill>
-              <a:latin typeface="Arial" panose="02080604020202020204" pitchFamily="34" charset="0"/>
-              <a:cs typeface="Arial" panose="02080604020202020204" pitchFamily="34" charset="0"/>
-            </a:endParaRPr>
-          </a:p>
-          <a:p>
-            <a:pPr>
-              <a:lnSpc>
-                <a:spcPct val="150000"/>
-              </a:lnSpc>
-            </a:pPr>
-            <a:r>
-              <a:rPr lang="en-US" altLang="zh-CN" sz="1000" dirty="0">
-                <a:solidFill>
-                  <a:schemeClr val="bg1">
-                    <a:lumMod val="50000"/>
-                  </a:schemeClr>
-                </a:solidFill>
-                <a:latin typeface="Arial" panose="02080604020202020204" pitchFamily="34" charset="0"/>
-                <a:cs typeface="Arial" panose="02080604020202020204" pitchFamily="34" charset="0"/>
-              </a:rPr>
-              <a:t>Mission: Enable developers to independently research and innovate based on the CANN community and build a win-win CANN ecosystem with deep roots and cross-industry collaboration and sharing.</a:t>
-            </a:r>
-            <a:endParaRPr lang="zh-CN" altLang="en-US" sz="1000" dirty="0">
-              <a:solidFill>
-                <a:schemeClr val="bg1">
-                  <a:lumMod val="50000"/>
-                </a:schemeClr>
-              </a:solidFill>
-              <a:latin typeface="Arial" panose="02080604020202020204" pitchFamily="34" charset="0"/>
-              <a:cs typeface="Arial" panose="02080604020202020204" pitchFamily="34" charset="0"/>
-            </a:endParaRPr>
-          </a:p>
-        </p:txBody>
-      </p:sp>
-      <p:pic>
-        <p:nvPicPr>
-          <p:cNvPr id="5" name="图片 4"/>
-          <p:cNvPicPr>
-            <a:picLocks noChangeAspect="1"/>
-          </p:cNvPicPr>
-          <p:nvPr/>
-        </p:nvPicPr>
-        <p:blipFill>
-          <a:blip r:embed="rId1">
-            <a:extLst>
-              <a:ext uri="{28A0092B-C50C-407E-A947-70E740481C1C}">
-                <a14:useLocalDpi xmlns:a14="http://schemas.microsoft.com/office/drawing/2010/main" val="0"/>
-              </a:ext>
-            </a:extLst>
-          </a:blip>
-          <a:stretch>
-            <a:fillRect/>
-          </a:stretch>
-        </p:blipFill>
-        <p:spPr>
-          <a:xfrm>
-            <a:off x="6925587" y="3938025"/>
-            <a:ext cx="1600438" cy="1600438"/>
-          </a:xfrm>
-          <a:prstGeom prst="rect">
-            <a:avLst/>
-          </a:prstGeom>
-        </p:spPr>
-      </p:pic>
       <p:pic>
         <p:nvPicPr>
           <p:cNvPr id="8" name="图片 7"/>
@@ -4191,7 +3894,7 @@
           <p:nvPr/>
         </p:nvPicPr>
         <p:blipFill>
-          <a:blip r:embed="rId2">
+          <a:blip r:embed="rId2" cstate="print">
             <a:extLst>
               <a:ext uri="{28A0092B-C50C-407E-A947-70E740481C1C}">
                 <a14:useLocalDpi xmlns:a14="http://schemas.microsoft.com/office/drawing/2010/main" val="0"/>
@@ -4220,8 +3923,8 @@
         </p:nvSpPr>
         <p:spPr>
           <a:xfrm>
-            <a:off x="7056392" y="5538463"/>
-            <a:ext cx="1430200" cy="246221"/>
+            <a:off x="7155102" y="5538463"/>
+            <a:ext cx="1467068" cy="246221"/>
           </a:xfrm>
           <a:prstGeom prst="rect">
             <a:avLst/>
@@ -4235,18 +3938,26 @@
           <a:lstStyle/>
           <a:p>
             <a:r>
-              <a:rPr lang="zh-CN" altLang="en-US" sz="1000" dirty="0"/>
+              <a:rPr lang="zh-CN" altLang="en-US" sz="1000" dirty="0">
+                <a:latin typeface="微软雅黑" panose="020B0503020204020204" pitchFamily="34" charset="-122"/>
+                <a:ea typeface="微软雅黑" panose="020B0503020204020204" pitchFamily="34" charset="-122"/>
+              </a:rPr>
               <a:t>上</a:t>
             </a:r>
             <a:r>
-              <a:rPr lang="en-US" altLang="zh-CN" sz="1000" dirty="0"/>
+              <a:rPr lang="en-US" altLang="zh-CN" sz="1000" dirty="0">
+                <a:latin typeface="微软雅黑" panose="020B0503020204020204" pitchFamily="34" charset="-122"/>
+                <a:ea typeface="微软雅黑" panose="020B0503020204020204" pitchFamily="34" charset="-122"/>
+              </a:rPr>
               <a:t>CANN</a:t>
             </a:r>
             <a:r>
-              <a:rPr lang="zh-CN" altLang="en-US" sz="1000" dirty="0"/>
+              <a:rPr lang="zh-CN" altLang="en-US" sz="1000" dirty="0">
+                <a:latin typeface="微软雅黑" panose="020B0503020204020204" pitchFamily="34" charset="-122"/>
+                <a:ea typeface="微软雅黑" panose="020B0503020204020204" pitchFamily="34" charset="-122"/>
+              </a:rPr>
               <a:t>社区获取干货</a:t>
             </a:r>
-            <a:endParaRPr lang="zh-CN" altLang="en-US" sz="1000" dirty="0"/>
           </a:p>
         </p:txBody>
       </p:sp>
@@ -4258,8 +3969,8 @@
         </p:nvSpPr>
         <p:spPr>
           <a:xfrm>
-            <a:off x="8741387" y="5538463"/>
-            <a:ext cx="1686680" cy="246221"/>
+            <a:off x="8715412" y="5538463"/>
+            <a:ext cx="1723549" cy="246221"/>
           </a:xfrm>
           <a:prstGeom prst="rect">
             <a:avLst/>
@@ -4273,18 +3984,26 @@
           <a:lstStyle/>
           <a:p>
             <a:r>
-              <a:rPr lang="zh-CN" altLang="en-US" sz="1000" dirty="0"/>
+              <a:rPr lang="zh-CN" altLang="en-US" sz="1000" dirty="0">
+                <a:latin typeface="微软雅黑" panose="020B0503020204020204" pitchFamily="34" charset="-122"/>
+                <a:ea typeface="微软雅黑" panose="020B0503020204020204" pitchFamily="34" charset="-122"/>
+              </a:rPr>
               <a:t>关注</a:t>
             </a:r>
             <a:r>
-              <a:rPr lang="en-US" altLang="zh-CN" sz="1000" dirty="0"/>
+              <a:rPr lang="en-US" altLang="zh-CN" sz="1000" dirty="0">
+                <a:latin typeface="微软雅黑" panose="020B0503020204020204" pitchFamily="34" charset="-122"/>
+                <a:ea typeface="微软雅黑" panose="020B0503020204020204" pitchFamily="34" charset="-122"/>
+              </a:rPr>
               <a:t>CANN</a:t>
             </a:r>
             <a:r>
-              <a:rPr lang="zh-CN" altLang="en-US" sz="1000" dirty="0"/>
+              <a:rPr lang="zh-CN" altLang="en-US" sz="1000" dirty="0">
+                <a:latin typeface="微软雅黑" panose="020B0503020204020204" pitchFamily="34" charset="-122"/>
+                <a:ea typeface="微软雅黑" panose="020B0503020204020204" pitchFamily="34" charset="-122"/>
+              </a:rPr>
               <a:t>公众号获取资讯</a:t>
             </a:r>
-            <a:endParaRPr lang="zh-CN" altLang="en-US" sz="1000" dirty="0"/>
           </a:p>
         </p:txBody>
       </p:sp>
@@ -4297,7 +4016,7 @@
         <p:spPr>
           <a:xfrm>
             <a:off x="620201" y="6130454"/>
-            <a:ext cx="1547218" cy="246221"/>
+            <a:ext cx="1745991" cy="246221"/>
           </a:xfrm>
           <a:prstGeom prst="rect">
             <a:avLst/>
@@ -4317,9 +4036,9 @@
                     <a:lumMod val="50000"/>
                   </a:schemeClr>
                 </a:solidFill>
-                <a:latin typeface="+mj-ea"/>
-                <a:ea typeface="+mj-ea"/>
-                <a:cs typeface="Arial" panose="02080604020202020204" pitchFamily="34" charset="0"/>
+                <a:latin typeface="微软雅黑" panose="020B0503020204020204" pitchFamily="34" charset="-122"/>
+                <a:ea typeface="微软雅黑" panose="020B0503020204020204" pitchFamily="34" charset="-122"/>
+                <a:cs typeface="Arial" panose="020B0604020202020204" pitchFamily="34" charset="0"/>
               </a:rPr>
               <a:t>https://gitcode.com/cann</a:t>
             </a:r>
@@ -4329,9 +4048,9 @@
                   <a:lumMod val="50000"/>
                 </a:schemeClr>
               </a:solidFill>
-              <a:latin typeface="+mj-ea"/>
-              <a:ea typeface="+mj-ea"/>
-              <a:cs typeface="Arial" panose="02080604020202020204" pitchFamily="34" charset="0"/>
+              <a:latin typeface="微软雅黑" panose="020B0503020204020204" pitchFamily="34" charset="-122"/>
+              <a:ea typeface="微软雅黑" panose="020B0503020204020204" pitchFamily="34" charset="-122"/>
+              <a:cs typeface="Arial" panose="020B0604020202020204" pitchFamily="34" charset="0"/>
             </a:endParaRPr>
           </a:p>
         </p:txBody>
@@ -4345,7 +4064,7 @@
           <p:nvPr/>
         </p:nvPicPr>
         <p:blipFill>
-          <a:blip r:embed="rId3">
+          <a:blip r:embed="rId3" cstate="print">
             <a:extLst>
               <a:ext uri="{28A0092B-C50C-407E-A947-70E740481C1C}">
                 <a14:useLocalDpi xmlns:a14="http://schemas.microsoft.com/office/drawing/2010/main" val="0"/>
@@ -4358,8 +4077,240 @@
         </p:blipFill>
         <p:spPr>
           <a:xfrm>
-            <a:off x="8696584" y="3898269"/>
+            <a:off x="8722559" y="3898269"/>
             <a:ext cx="1686679" cy="1686679"/>
+          </a:xfrm>
+          <a:prstGeom prst="rect">
+            <a:avLst/>
+          </a:prstGeom>
+        </p:spPr>
+      </p:pic>
+      <p:sp>
+        <p:nvSpPr>
+          <p:cNvPr id="4" name="文本框 3"/>
+          <p:cNvSpPr txBox="1"/>
+          <p:nvPr/>
+        </p:nvSpPr>
+        <p:spPr>
+          <a:xfrm>
+            <a:off x="6855420" y="1208625"/>
+            <a:ext cx="4699220" cy="2268855"/>
+          </a:xfrm>
+          <a:prstGeom prst="rect">
+            <a:avLst/>
+          </a:prstGeom>
+          <a:noFill/>
+        </p:spPr>
+        <p:txBody>
+          <a:bodyPr wrap="square" rtlCol="0">
+            <a:spAutoFit/>
+          </a:bodyPr>
+          <a:lstStyle/>
+          <a:p>
+            <a:pPr marR="0" lvl="0" indent="0" algn="l" defTabSz="914400" rtl="0" fontAlgn="auto">
+              <a:lnSpc>
+                <a:spcPts val="1940"/>
+              </a:lnSpc>
+              <a:spcBef>
+                <a:spcPts val="0"/>
+              </a:spcBef>
+              <a:buClrTx/>
+              <a:buSzTx/>
+              <a:buFontTx/>
+              <a:buNone/>
+            </a:pPr>
+            <a:r>
+              <a:rPr kumimoji="0" lang="zh-CN" altLang="en-US" sz="1200" i="0" u="none" strike="noStrike" kern="1200" cap="none" spc="0" normalizeH="0" baseline="0" noProof="0" dirty="0">
+                <a:ln>
+                  <a:noFill/>
+                </a:ln>
+                <a:solidFill>
+                  <a:schemeClr val="bg1">
+                    <a:lumMod val="50000"/>
+                  </a:schemeClr>
+                </a:solidFill>
+                <a:effectLst/>
+                <a:uLnTx/>
+                <a:uFillTx/>
+                <a:latin typeface="微软雅黑" panose="020B0503020204020204" pitchFamily="34" charset="-122"/>
+                <a:ea typeface="微软雅黑" panose="020B0503020204020204" pitchFamily="34" charset="-122"/>
+                <a:cs typeface="微软雅黑" panose="020B0503020204020204" pitchFamily="34" charset="-122"/>
+              </a:rPr>
+              <a:t>社区愿景：打造开放易用、技术领先的AI算力新生态</a:t>
+            </a:r>
+          </a:p>
+          <a:p>
+            <a:pPr marR="0" lvl="0" indent="0" algn="l" defTabSz="914400" rtl="0" fontAlgn="auto">
+              <a:lnSpc>
+                <a:spcPts val="1940"/>
+              </a:lnSpc>
+              <a:spcBef>
+                <a:spcPts val="0"/>
+              </a:spcBef>
+              <a:buClrTx/>
+              <a:buSzTx/>
+              <a:buFontTx/>
+              <a:buNone/>
+            </a:pPr>
+            <a:r>
+              <a:rPr kumimoji="0" lang="zh-CN" altLang="en-US" sz="1200" i="0" u="none" strike="noStrike" kern="1200" cap="none" spc="0" normalizeH="0" baseline="0" noProof="0" dirty="0">
+                <a:ln>
+                  <a:noFill/>
+                </a:ln>
+                <a:solidFill>
+                  <a:schemeClr val="bg1">
+                    <a:lumMod val="50000"/>
+                  </a:schemeClr>
+                </a:solidFill>
+                <a:effectLst/>
+                <a:uLnTx/>
+                <a:uFillTx/>
+                <a:latin typeface="微软雅黑" panose="020B0503020204020204" pitchFamily="34" charset="-122"/>
+                <a:ea typeface="微软雅黑" panose="020B0503020204020204" pitchFamily="34" charset="-122"/>
+                <a:cs typeface="微软雅黑" panose="020B0503020204020204" pitchFamily="34" charset="-122"/>
+              </a:rPr>
+              <a:t>社区使命：以开源驱动技术创新，降低开发门槛，聚力构筑高性能昇腾 AI 算力底座</a:t>
+            </a:r>
+          </a:p>
+          <a:p>
+            <a:pPr marL="0" marR="0" lvl="0" indent="0" algn="l" defTabSz="914400" rtl="0" eaLnBrk="1" fontAlgn="auto" latinLnBrk="0" hangingPunct="1">
+              <a:lnSpc>
+                <a:spcPct val="150000"/>
+              </a:lnSpc>
+              <a:spcBef>
+                <a:spcPts val="0"/>
+              </a:spcBef>
+              <a:spcAft>
+                <a:spcPts val="0"/>
+              </a:spcAft>
+              <a:buClrTx/>
+              <a:buSzTx/>
+              <a:buFontTx/>
+              <a:buNone/>
+              <a:defRPr/>
+            </a:pPr>
+            <a:endParaRPr kumimoji="0" lang="en-US" altLang="zh-CN" sz="1200" b="0" i="0" u="none" strike="noStrike" kern="1200" cap="none" spc="0" normalizeH="0" baseline="0" noProof="0" dirty="0">
+              <a:ln>
+                <a:noFill/>
+              </a:ln>
+              <a:solidFill>
+                <a:prstClr val="white">
+                  <a:lumMod val="50000"/>
+                </a:prstClr>
+              </a:solidFill>
+              <a:effectLst/>
+              <a:uLnTx/>
+              <a:uFillTx/>
+              <a:latin typeface="微软雅黑" panose="020B0503020204020204" pitchFamily="34" charset="-122"/>
+              <a:ea typeface="微软雅黑" panose="020B0503020204020204" pitchFamily="34" charset="-122"/>
+            </a:endParaRPr>
+          </a:p>
+          <a:p>
+            <a:pPr marL="0" marR="0" lvl="0" indent="0" algn="l" defTabSz="914400" rtl="0" eaLnBrk="1" fontAlgn="auto" latinLnBrk="0" hangingPunct="1">
+              <a:lnSpc>
+                <a:spcPct val="150000"/>
+              </a:lnSpc>
+              <a:spcBef>
+                <a:spcPts val="0"/>
+              </a:spcBef>
+              <a:spcAft>
+                <a:spcPts val="0"/>
+              </a:spcAft>
+              <a:buClrTx/>
+              <a:buSzTx/>
+              <a:buFontTx/>
+              <a:buNone/>
+              <a:defRPr/>
+            </a:pPr>
+            <a:r>
+              <a:rPr kumimoji="0" lang="en-US" altLang="zh-CN" sz="1000" b="0" i="0" u="none" strike="noStrike" kern="1200" cap="none" spc="0" normalizeH="0" baseline="0" noProof="0" dirty="0">
+                <a:ln>
+                  <a:noFill/>
+                </a:ln>
+                <a:solidFill>
+                  <a:prstClr val="white">
+                    <a:lumMod val="50000"/>
+                  </a:prstClr>
+                </a:solidFill>
+                <a:effectLst/>
+                <a:uLnTx/>
+                <a:uFillTx/>
+                <a:latin typeface="微软雅黑" panose="020B0503020204020204" pitchFamily="34" charset="-122"/>
+                <a:ea typeface="微软雅黑" panose="020B0503020204020204" pitchFamily="34" charset="-122"/>
+                <a:cs typeface="Arial" panose="020B0604020202020204" pitchFamily="34" charset="0"/>
+              </a:rPr>
+              <a:t>Vision: Building an Open, Easy-to-Use, and Technology-leading AI Computing Ecosystem</a:t>
+            </a:r>
+          </a:p>
+          <a:p>
+            <a:pPr marL="0" marR="0" lvl="0" indent="0" algn="l" defTabSz="914400" rtl="0" eaLnBrk="1" fontAlgn="auto" latinLnBrk="0" hangingPunct="1">
+              <a:lnSpc>
+                <a:spcPct val="150000"/>
+              </a:lnSpc>
+              <a:spcBef>
+                <a:spcPts val="0"/>
+              </a:spcBef>
+              <a:spcAft>
+                <a:spcPts val="0"/>
+              </a:spcAft>
+              <a:buClrTx/>
+              <a:buSzTx/>
+              <a:buFontTx/>
+              <a:buNone/>
+              <a:defRPr/>
+            </a:pPr>
+            <a:r>
+              <a:rPr kumimoji="0" lang="en-US" altLang="zh-CN" sz="1000" b="0" i="0" u="none" strike="noStrike" kern="1200" cap="none" spc="0" normalizeH="0" baseline="0" noProof="0" dirty="0">
+                <a:ln>
+                  <a:noFill/>
+                </a:ln>
+                <a:solidFill>
+                  <a:prstClr val="white">
+                    <a:lumMod val="50000"/>
+                  </a:prstClr>
+                </a:solidFill>
+                <a:effectLst/>
+                <a:uLnTx/>
+                <a:uFillTx/>
+                <a:latin typeface="微软雅黑" panose="020B0503020204020204" pitchFamily="34" charset="-122"/>
+                <a:ea typeface="微软雅黑" panose="020B0503020204020204" pitchFamily="34" charset="-122"/>
+                <a:cs typeface="Arial" panose="020B0604020202020204" pitchFamily="34" charset="0"/>
+              </a:rPr>
+              <a:t>Mission: Drive technological innovation through open source, lower development barriers, and jointly build a high-performance Ascend AI computing infrastructure.</a:t>
+            </a:r>
+          </a:p>
+        </p:txBody>
+      </p:sp>
+      <p:pic>
+        <p:nvPicPr>
+          <p:cNvPr id="5" name="图片 4">
+            <a:extLst>
+              <a:ext uri="{FF2B5EF4-FFF2-40B4-BE49-F238E27FC236}">
+                <a16:creationId xmlns:a16="http://schemas.microsoft.com/office/drawing/2014/main" id="{B72BCF70-CE23-E984-799A-4504C5AD9940}"/>
+              </a:ext>
+            </a:extLst>
+          </p:cNvPr>
+          <p:cNvPicPr>
+            <a:picLocks noChangeAspect="1"/>
+          </p:cNvPicPr>
+          <p:nvPr/>
+        </p:nvPicPr>
+        <p:blipFill>
+          <a:blip r:embed="rId4" cstate="print">
+            <a:extLst>
+              <a:ext uri="{28A0092B-C50C-407E-A947-70E740481C1C}">
+                <a14:useLocalDpi xmlns:a14="http://schemas.microsoft.com/office/drawing/2010/main" val="0"/>
+              </a:ext>
+            </a:extLst>
+          </a:blip>
+          <a:stretch>
+            <a:fillRect/>
+          </a:stretch>
+        </p:blipFill>
+        <p:spPr>
+          <a:xfrm>
+            <a:off x="7056392" y="3921325"/>
+            <a:ext cx="1648038" cy="1648038"/>
           </a:xfrm>
           <a:prstGeom prst="rect">
             <a:avLst/>
@@ -4625,6 +4576,8 @@
       </a:bgFillStyleLst>
     </a:fmtScheme>
   </a:themeElements>
+  <a:objectDefaults/>
+  <a:extraClrSchemeLst/>
   <a:extLst>
     <a:ext uri="{05A4C25C-085E-4340-85A3-A5531E510DB2}">
       <thm15:themeFamily xmlns:thm15="http://schemas.microsoft.com/office/thememl/2012/main" name="Office Theme" id="{62F939B6-93AF-4DB8-9C6B-D6C7DFDC589F}" vid="{4A3C46E8-61CC-4603-A589-7422A47A8E4A}"/>
